--- a/AutomaTivio/reports/2026-08/pptx/Tivio ALT Light - Relatório de Gestão - Agosto 2026.pptx
+++ b/AutomaTivio/reports/2026-08/pptx/Tivio ALT Light - Relatório de Gestão - Agosto 2026.pptx
@@ -4211,7 +4211,7 @@
                           </a:solidFill>
                           <a:latin typeface="Versos"/>
                         </a:rPr>
-                        <a:t>66%</a:t>
+                        <a:t>65,59%</a:t>
                       </a:r>
                     </a:p>
                   </a:txBody>
@@ -4234,7 +4234,7 @@
                           </a:solidFill>
                           <a:latin typeface="Versos"/>
                         </a:rPr>
-                        <a:t>102%</a:t>
+                        <a:t>101,93%</a:t>
                       </a:r>
                     </a:p>
                   </a:txBody>
@@ -4326,7 +4326,7 @@
                           </a:solidFill>
                           <a:latin typeface="Versos"/>
                         </a:rPr>
-                        <a:t>111%</a:t>
+                        <a:t>110,53%</a:t>
                       </a:r>
                     </a:p>
                   </a:txBody>
